--- a/DATABASE FORENSICS DAY 7 OF 30.pptx
+++ b/DATABASE FORENSICS DAY 7 OF 30.pptx
@@ -4128,7 +4128,7 @@
         <p:spPr>
           <a:xfrm>
             <a:off x="228600" y="1115060"/>
-            <a:ext cx="4667885" cy="2232660"/>
+            <a:ext cx="4667885" cy="5262245"/>
           </a:xfrm>
           <a:prstGeom prst="rect">
             <a:avLst/>
@@ -4188,6 +4188,319 @@
               <a:solidFill>
                 <a:srgbClr val="FFC000"/>
               </a:solidFill>
+              <a:sym typeface="+mn-ea"/>
+            </a:endParaRPr>
+          </a:p>
+          <a:p>
+            <a:pPr algn="l"/>
+            <a:r>
+              <a:rPr lang="en-US" altLang="en-GB" sz="2000" b="1">
+                <a:solidFill>
+                  <a:schemeClr val="bg1"/>
+                </a:solidFill>
+                <a:sym typeface="+mn-ea"/>
+              </a:rPr>
+              <a:t>  THE RANGE OF VALUES = </a:t>
+            </a:r>
+            <a:r>
+              <a:rPr lang="en-US" altLang="en-GB" sz="2000" b="1">
+                <a:solidFill>
+                  <a:srgbClr val="FFFF00"/>
+                </a:solidFill>
+                <a:sym typeface="+mn-ea"/>
+              </a:rPr>
+              <a:t>0 to (2</a:t>
+            </a:r>
+            <a:r>
+              <a:rPr lang="en-US" altLang="en-US" sz="2000" b="1">
+                <a:solidFill>
+                  <a:srgbClr val="FFFF00"/>
+                </a:solidFill>
+                <a:sym typeface="+mn-ea"/>
+              </a:rPr>
+              <a:t>ⁿ</a:t>
+            </a:r>
+            <a:r>
+              <a:rPr lang="en-US" altLang="en-GB" sz="2000" b="1">
+                <a:solidFill>
+                  <a:srgbClr val="FFFF00"/>
+                </a:solidFill>
+                <a:sym typeface="+mn-ea"/>
+              </a:rPr>
+              <a:t> − 1).</a:t>
+            </a:r>
+            <a:endParaRPr lang="en-US" altLang="en-GB" sz="2000" b="1">
+              <a:solidFill>
+                <a:srgbClr val="FFFF00"/>
+              </a:solidFill>
+              <a:sym typeface="+mn-ea"/>
+            </a:endParaRPr>
+          </a:p>
+          <a:p>
+            <a:pPr algn="l"/>
+            <a:r>
+              <a:rPr lang="en-US" altLang="en-GB" sz="2000" b="1">
+                <a:solidFill>
+                  <a:srgbClr val="FFFF00"/>
+                </a:solidFill>
+                <a:sym typeface="+mn-ea"/>
+              </a:rPr>
+              <a:t>n is any positive whole number from 0</a:t>
+            </a:r>
+            <a:endParaRPr lang="en-US" altLang="en-GB" sz="2000" b="1">
+              <a:solidFill>
+                <a:srgbClr val="FFFF00"/>
+              </a:solidFill>
+              <a:sym typeface="+mn-ea"/>
+            </a:endParaRPr>
+          </a:p>
+          <a:p>
+            <a:pPr algn="l"/>
+            <a:r>
+              <a:rPr lang="en-US" altLang="en-GB" sz="2000" b="1">
+                <a:solidFill>
+                  <a:srgbClr val="FFFF00"/>
+                </a:solidFill>
+                <a:sym typeface="+mn-ea"/>
+              </a:rPr>
+              <a:t> for n = 4</a:t>
+            </a:r>
+            <a:endParaRPr lang="en-US" altLang="en-GB" sz="2000" b="1">
+              <a:solidFill>
+                <a:srgbClr val="FFFF00"/>
+              </a:solidFill>
+              <a:sym typeface="+mn-ea"/>
+            </a:endParaRPr>
+          </a:p>
+          <a:p>
+            <a:pPr algn="l"/>
+            <a:r>
+              <a:rPr lang="en-US" altLang="en-GB" sz="2000" b="1">
+                <a:solidFill>
+                  <a:srgbClr val="FFFF00"/>
+                </a:solidFill>
+                <a:sym typeface="+mn-ea"/>
+              </a:rPr>
+              <a:t>n= 0, 1, 2, 3, 4</a:t>
+            </a:r>
+            <a:endParaRPr lang="en-US" altLang="en-GB" sz="2000" b="1">
+              <a:solidFill>
+                <a:srgbClr val="FFFF00"/>
+              </a:solidFill>
+              <a:sym typeface="+mn-ea"/>
+            </a:endParaRPr>
+          </a:p>
+          <a:p>
+            <a:pPr algn="l"/>
+            <a:r>
+              <a:rPr lang="en-US" altLang="en-GB" sz="2000" b="1">
+                <a:solidFill>
+                  <a:srgbClr val="FFFF00"/>
+                </a:solidFill>
+                <a:sym typeface="+mn-ea"/>
+              </a:rPr>
+              <a:t>1 2 4 8 16</a:t>
+            </a:r>
+            <a:endParaRPr lang="en-US" altLang="en-GB" sz="2000" b="1">
+              <a:solidFill>
+                <a:srgbClr val="FFFF00"/>
+              </a:solidFill>
+              <a:sym typeface="+mn-ea"/>
+            </a:endParaRPr>
+          </a:p>
+          <a:p>
+            <a:pPr algn="l"/>
+            <a:r>
+              <a:rPr lang="en-US" altLang="en-GB" sz="2000">
+                <a:solidFill>
+                  <a:srgbClr val="FFC000"/>
+                </a:solidFill>
+                <a:sym typeface="+mn-ea"/>
+              </a:rPr>
+              <a:t> range for a nibble</a:t>
+            </a:r>
+            <a:endParaRPr lang="en-US" altLang="en-GB" sz="2000">
+              <a:solidFill>
+                <a:srgbClr val="FFC000"/>
+              </a:solidFill>
+              <a:sym typeface="+mn-ea"/>
+            </a:endParaRPr>
+          </a:p>
+          <a:p>
+            <a:pPr algn="l"/>
+            <a:r>
+              <a:rPr lang="en-US" altLang="en-GB" sz="2000">
+                <a:solidFill>
+                  <a:srgbClr val="FFC000"/>
+                </a:solidFill>
+                <a:sym typeface="+mn-ea"/>
+              </a:rPr>
+              <a:t>16 - 1 = 15</a:t>
+            </a:r>
+            <a:endParaRPr lang="en-US" altLang="en-GB" sz="2000">
+              <a:solidFill>
+                <a:srgbClr val="FFC000"/>
+              </a:solidFill>
+              <a:sym typeface="+mn-ea"/>
+            </a:endParaRPr>
+          </a:p>
+          <a:p>
+            <a:pPr algn="l"/>
+            <a:r>
+              <a:rPr lang="en-US" altLang="en-GB" sz="2000">
+                <a:solidFill>
+                  <a:srgbClr val="FFC000"/>
+                </a:solidFill>
+                <a:sym typeface="+mn-ea"/>
+              </a:rPr>
+              <a:t>range will be 0-15</a:t>
+            </a:r>
+            <a:endParaRPr lang="en-US" altLang="en-GB" sz="2000">
+              <a:solidFill>
+                <a:srgbClr val="FFC000"/>
+              </a:solidFill>
+              <a:sym typeface="+mn-ea"/>
+            </a:endParaRPr>
+          </a:p>
+          <a:p>
+            <a:pPr algn="l"/>
+            <a:endParaRPr lang="en-US" altLang="en-GB" sz="2000">
+              <a:solidFill>
+                <a:srgbClr val="FFC000"/>
+              </a:solidFill>
+              <a:sym typeface="+mn-ea"/>
+            </a:endParaRPr>
+          </a:p>
+          <a:p>
+            <a:pPr algn="l"/>
+            <a:r>
+              <a:rPr lang="en-US" altLang="en-GB" sz="2000">
+                <a:solidFill>
+                  <a:srgbClr val="FFC000"/>
+                </a:solidFill>
+                <a:sym typeface="+mn-ea"/>
+              </a:rPr>
+              <a:t>two states of the computer </a:t>
+            </a:r>
+            <a:endParaRPr lang="en-US" altLang="en-GB" sz="2000">
+              <a:solidFill>
+                <a:srgbClr val="FFC000"/>
+              </a:solidFill>
+              <a:sym typeface="+mn-ea"/>
+            </a:endParaRPr>
+          </a:p>
+          <a:p>
+            <a:pPr algn="l"/>
+            <a:r>
+              <a:rPr lang="en-US" altLang="en-GB" sz="2000">
+                <a:solidFill>
+                  <a:srgbClr val="FFC000"/>
+                </a:solidFill>
+                <a:sym typeface="+mn-ea"/>
+              </a:rPr>
+              <a:t>ON = 1</a:t>
+            </a:r>
+            <a:endParaRPr lang="en-US" altLang="en-GB" sz="2000">
+              <a:solidFill>
+                <a:srgbClr val="FFC000"/>
+              </a:solidFill>
+              <a:sym typeface="+mn-ea"/>
+            </a:endParaRPr>
+          </a:p>
+          <a:p>
+            <a:pPr algn="l"/>
+            <a:r>
+              <a:rPr lang="en-US" altLang="en-GB" sz="2000">
+                <a:solidFill>
+                  <a:srgbClr val="FFC000"/>
+                </a:solidFill>
+                <a:sym typeface="+mn-ea"/>
+              </a:rPr>
+              <a:t>OFF = 0 </a:t>
+            </a:r>
+            <a:endParaRPr lang="en-US" altLang="en-GB" sz="2000">
+              <a:solidFill>
+                <a:srgbClr val="FFC000"/>
+              </a:solidFill>
+              <a:sym typeface="+mn-ea"/>
+            </a:endParaRPr>
+          </a:p>
+          <a:p>
+            <a:pPr algn="l"/>
+            <a:r>
+              <a:rPr lang="en-US" altLang="en-GB" sz="2000">
+                <a:solidFill>
+                  <a:srgbClr val="FFC000"/>
+                </a:solidFill>
+                <a:sym typeface="+mn-ea"/>
+              </a:rPr>
+              <a:t>USE THE 8 4 2 1 rule</a:t>
+            </a:r>
+            <a:endParaRPr lang="en-US" altLang="en-GB" sz="2000">
+              <a:solidFill>
+                <a:srgbClr val="FFC000"/>
+              </a:solidFill>
+              <a:sym typeface="+mn-ea"/>
+            </a:endParaRPr>
+          </a:p>
+          <a:p>
+            <a:pPr algn="l"/>
+            <a:r>
+              <a:rPr lang="en-US" altLang="en-GB" sz="2000">
+                <a:solidFill>
+                  <a:srgbClr val="FFC000"/>
+                </a:solidFill>
+                <a:sym typeface="+mn-ea"/>
+              </a:rPr>
+              <a:t>0000 = 0</a:t>
+            </a:r>
+            <a:endParaRPr lang="en-US" altLang="en-GB" sz="2000">
+              <a:solidFill>
+                <a:srgbClr val="FFC000"/>
+              </a:solidFill>
+              <a:sym typeface="+mn-ea"/>
+            </a:endParaRPr>
+          </a:p>
+          <a:p>
+            <a:pPr algn="l"/>
+            <a:r>
+              <a:rPr lang="en-US" altLang="en-GB" sz="2000">
+                <a:solidFill>
+                  <a:srgbClr val="FFC000"/>
+                </a:solidFill>
+                <a:sym typeface="+mn-ea"/>
+              </a:rPr>
+              <a:t>1111 =   8 + 4 + 2 + 1 =  15</a:t>
+            </a:r>
+            <a:endParaRPr lang="en-US" altLang="en-GB" sz="2000">
+              <a:solidFill>
+                <a:srgbClr val="FFC000"/>
+              </a:solidFill>
+              <a:sym typeface="+mn-ea"/>
+            </a:endParaRPr>
+          </a:p>
+          <a:p>
+            <a:pPr algn="l"/>
+            <a:endParaRPr lang="en-US" altLang="en-GB" sz="2000">
+              <a:solidFill>
+                <a:srgbClr val="FFC000"/>
+              </a:solidFill>
+            </a:endParaRPr>
+          </a:p>
+          <a:p>
+            <a:pPr algn="l"/>
+            <a:endParaRPr lang="en-US" altLang="en-GB" sz="2000">
+              <a:solidFill>
+                <a:srgbClr val="FFC000"/>
+              </a:solidFill>
+            </a:endParaRPr>
+          </a:p>
+          <a:p>
+            <a:pPr algn="l"/>
+            <a:endParaRPr lang="en-US" altLang="en-GB" sz="2000">
+              <a:solidFill>
+                <a:srgbClr val="FFC000"/>
+              </a:solidFill>
             </a:endParaRPr>
           </a:p>
           <a:p>
@@ -4199,6 +4512,14 @@
             </a:endParaRPr>
           </a:p>
           <a:p>
+            <a:r>
+              <a:rPr lang="en-US" altLang="en-GB">
+                <a:solidFill>
+                  <a:schemeClr val="bg1"/>
+                </a:solidFill>
+              </a:rPr>
+              <a:t> </a:t>
+            </a:r>
             <a:endParaRPr lang="en-US" altLang="en-GB">
               <a:solidFill>
                 <a:schemeClr val="bg1"/>
@@ -4207,6 +4528,20 @@
           </a:p>
           <a:p>
             <a:endParaRPr lang="en-US" altLang="en-GB">
+              <a:solidFill>
+                <a:schemeClr val="bg1"/>
+              </a:solidFill>
+            </a:endParaRPr>
+          </a:p>
+          <a:p>
+            <a:endParaRPr lang="en-US" altLang="en-GB" baseline="30000">
+              <a:solidFill>
+                <a:schemeClr val="bg1"/>
+              </a:solidFill>
+            </a:endParaRPr>
+          </a:p>
+          <a:p>
+            <a:endParaRPr lang="en-US" altLang="en-GB" baseline="30000">
               <a:solidFill>
                 <a:schemeClr val="bg1"/>
               </a:solidFill>
@@ -4222,8 +4557,8 @@
         </p:nvSpPr>
         <p:spPr>
           <a:xfrm>
-            <a:off x="7219950" y="859155"/>
-            <a:ext cx="4510405" cy="2193290"/>
+            <a:off x="6763385" y="859155"/>
+            <a:ext cx="4966970" cy="4356100"/>
           </a:xfrm>
           <a:prstGeom prst="rect">
             <a:avLst/>
@@ -4290,6 +4625,170 @@
             </a:endParaRPr>
           </a:p>
           <a:p>
+            <a:r>
+              <a:rPr lang="en-US" altLang="en-GB">
+                <a:solidFill>
+                  <a:srgbClr val="FFC000"/>
+                </a:solidFill>
+              </a:rPr>
+              <a:t>(n=8)</a:t>
+            </a:r>
+            <a:endParaRPr lang="en-US" altLang="en-GB">
+              <a:solidFill>
+                <a:srgbClr val="FFC000"/>
+              </a:solidFill>
+            </a:endParaRPr>
+          </a:p>
+          <a:p>
+            <a:r>
+              <a:rPr lang="en-US" altLang="en-GB">
+                <a:solidFill>
+                  <a:srgbClr val="FFC000"/>
+                </a:solidFill>
+              </a:rPr>
+              <a:t>n = 0 , 1, 2, 3, 4, 5,6,7,8</a:t>
+            </a:r>
+            <a:endParaRPr lang="en-US" altLang="en-GB">
+              <a:solidFill>
+                <a:srgbClr val="FFC000"/>
+              </a:solidFill>
+            </a:endParaRPr>
+          </a:p>
+          <a:p>
+            <a:r>
+              <a:rPr lang="en-US" altLang="en-GB">
+                <a:solidFill>
+                  <a:srgbClr val="FFC000"/>
+                </a:solidFill>
+              </a:rPr>
+              <a:t>1, 2, 4, 8, 16, 32, 64, 128, 256</a:t>
+            </a:r>
+            <a:endParaRPr lang="en-US" altLang="en-GB">
+              <a:solidFill>
+                <a:srgbClr val="FFC000"/>
+              </a:solidFill>
+            </a:endParaRPr>
+          </a:p>
+          <a:p>
+            <a:r>
+              <a:rPr lang="en-US" altLang="en-GB">
+                <a:solidFill>
+                  <a:srgbClr val="FFC000"/>
+                </a:solidFill>
+              </a:rPr>
+              <a:t> 256-1 = 255</a:t>
+            </a:r>
+            <a:endParaRPr lang="en-US" altLang="en-GB">
+              <a:solidFill>
+                <a:srgbClr val="FFC000"/>
+              </a:solidFill>
+            </a:endParaRPr>
+          </a:p>
+          <a:p>
+            <a:r>
+              <a:rPr lang="en-US" altLang="en-GB">
+                <a:solidFill>
+                  <a:srgbClr val="FFC000"/>
+                </a:solidFill>
+              </a:rPr>
+              <a:t>range for a byte is  0-255</a:t>
+            </a:r>
+            <a:endParaRPr lang="en-US" altLang="en-GB">
+              <a:solidFill>
+                <a:srgbClr val="FFC000"/>
+              </a:solidFill>
+            </a:endParaRPr>
+          </a:p>
+          <a:p>
+            <a:endParaRPr lang="en-US" altLang="en-GB">
+              <a:solidFill>
+                <a:srgbClr val="FFC000"/>
+              </a:solidFill>
+            </a:endParaRPr>
+          </a:p>
+          <a:p>
+            <a:r>
+              <a:rPr lang="en-US" altLang="en-GB">
+                <a:solidFill>
+                  <a:srgbClr val="FFC000"/>
+                </a:solidFill>
+              </a:rPr>
+              <a:t>state all OFF       128 64 32 16 8 4 2 1 rule </a:t>
+            </a:r>
+            <a:endParaRPr lang="en-US" altLang="en-GB">
+              <a:solidFill>
+                <a:srgbClr val="FFC000"/>
+              </a:solidFill>
+            </a:endParaRPr>
+          </a:p>
+          <a:p>
+            <a:r>
+              <a:rPr lang="en-US" altLang="en-GB">
+                <a:solidFill>
+                  <a:srgbClr val="FFC000"/>
+                </a:solidFill>
+              </a:rPr>
+              <a:t>00000000 = 0</a:t>
+            </a:r>
+            <a:endParaRPr lang="en-US" altLang="en-GB">
+              <a:solidFill>
+                <a:srgbClr val="FFC000"/>
+              </a:solidFill>
+            </a:endParaRPr>
+          </a:p>
+          <a:p>
+            <a:r>
+              <a:rPr lang="en-US" altLang="en-GB">
+                <a:solidFill>
+                  <a:srgbClr val="FFC000"/>
+                </a:solidFill>
+              </a:rPr>
+              <a:t>all ON</a:t>
+            </a:r>
+            <a:endParaRPr lang="en-US" altLang="en-GB">
+              <a:solidFill>
+                <a:srgbClr val="FFC000"/>
+              </a:solidFill>
+            </a:endParaRPr>
+          </a:p>
+          <a:p>
+            <a:r>
+              <a:rPr lang="en-US" altLang="en-GB">
+                <a:solidFill>
+                  <a:srgbClr val="FFC000"/>
+                </a:solidFill>
+              </a:rPr>
+              <a:t>11111111 =  1 + 2 + 4 + 8 + 16 + 32 +64 +128 = 255 </a:t>
+            </a:r>
+            <a:endParaRPr lang="en-US" altLang="en-GB">
+              <a:solidFill>
+                <a:srgbClr val="FFC000"/>
+              </a:solidFill>
+            </a:endParaRPr>
+          </a:p>
+          <a:p>
+            <a:endParaRPr lang="en-US" altLang="en-GB">
+              <a:solidFill>
+                <a:srgbClr val="FFC000"/>
+              </a:solidFill>
+            </a:endParaRPr>
+          </a:p>
+          <a:p>
+            <a:r>
+              <a:rPr lang="en-US" altLang="en-GB">
+                <a:solidFill>
+                  <a:srgbClr val="FFC000"/>
+                </a:solidFill>
+              </a:rPr>
+              <a:t>255 is the highest whole number when all the bits are on in a byte</a:t>
+            </a:r>
+            <a:endParaRPr lang="en-US" altLang="en-GB">
+              <a:solidFill>
+                <a:srgbClr val="FFC000"/>
+              </a:solidFill>
+            </a:endParaRPr>
+          </a:p>
+          <a:p>
             <a:endParaRPr lang="en-US" altLang="en-GB">
               <a:solidFill>
                 <a:schemeClr val="bg1"/>
@@ -4306,7 +4805,7 @@
         </p:nvSpPr>
         <p:spPr>
           <a:xfrm>
-            <a:off x="2015490" y="6244590"/>
+            <a:off x="2015490" y="6376670"/>
             <a:ext cx="7485380" cy="368300"/>
           </a:xfrm>
           <a:prstGeom prst="rect">
@@ -4708,8 +5207,8 @@
         </p:nvSpPr>
         <p:spPr>
           <a:xfrm>
-            <a:off x="8825230" y="859155"/>
-            <a:ext cx="2128520" cy="3377565"/>
+            <a:off x="7098665" y="859155"/>
+            <a:ext cx="4860290" cy="3377565"/>
           </a:xfrm>
           <a:prstGeom prst="rect">
             <a:avLst/>
@@ -4734,7 +5233,7 @@
                   <a:schemeClr val="bg1"/>
                 </a:solidFill>
               </a:rPr>
-              <a:t>00000001</a:t>
+              <a:t>00000001  = 1 </a:t>
             </a:r>
             <a:endParaRPr lang="en-US" altLang="en-GB" b="1">
               <a:solidFill>
@@ -4743,6 +5242,14 @@
             </a:endParaRPr>
           </a:p>
           <a:p>
+            <a:r>
+              <a:rPr lang="en-US" altLang="en-GB" b="1">
+                <a:solidFill>
+                  <a:schemeClr val="bg1"/>
+                </a:solidFill>
+              </a:rPr>
+              <a:t>10000000    =  128</a:t>
+            </a:r>
             <a:endParaRPr lang="en-US" altLang="en-GB" b="1">
               <a:solidFill>
                 <a:schemeClr val="bg1"/>
@@ -4756,7 +5263,112 @@
                   <a:schemeClr val="bg1"/>
                 </a:solidFill>
               </a:rPr>
-              <a:t>10000000 </a:t>
+              <a:t>00001111</a:t>
+            </a:r>
+            <a:r>
+              <a:rPr lang="en-US" altLang="en-US" b="1">
+                <a:solidFill>
+                  <a:schemeClr val="bg1"/>
+                </a:solidFill>
+              </a:rPr>
+              <a:t>₂ =   15</a:t>
+            </a:r>
+            <a:endParaRPr lang="en-US" altLang="en-US" b="1">
+              <a:solidFill>
+                <a:schemeClr val="bg1"/>
+              </a:solidFill>
+            </a:endParaRPr>
+          </a:p>
+          <a:p>
+            <a:r>
+              <a:rPr lang="en-US" altLang="en-GB" b="1">
+                <a:solidFill>
+                  <a:schemeClr val="bg1"/>
+                </a:solidFill>
+              </a:rPr>
+              <a:t>10101010</a:t>
+            </a:r>
+            <a:r>
+              <a:rPr lang="en-US" altLang="en-US" b="1">
+                <a:solidFill>
+                  <a:schemeClr val="bg1"/>
+                </a:solidFill>
+              </a:rPr>
+              <a:t>₂ = 128 + 0 + 32 + 0 + 8 + 0 + 2 + 0 = 170</a:t>
+            </a:r>
+            <a:endParaRPr lang="en-US" altLang="en-US" b="1">
+              <a:solidFill>
+                <a:schemeClr val="bg1"/>
+              </a:solidFill>
+            </a:endParaRPr>
+          </a:p>
+          <a:p>
+            <a:endParaRPr lang="en-US" altLang="en-US" b="1">
+              <a:solidFill>
+                <a:schemeClr val="bg1"/>
+              </a:solidFill>
+            </a:endParaRPr>
+          </a:p>
+          <a:p>
+            <a:r>
+              <a:rPr lang="en-US" altLang="en-GB" b="1">
+                <a:solidFill>
+                  <a:schemeClr val="bg1"/>
+                </a:solidFill>
+              </a:rPr>
+              <a:t>11111110</a:t>
+            </a:r>
+            <a:r>
+              <a:rPr lang="en-US" altLang="en-US" b="1">
+                <a:solidFill>
+                  <a:schemeClr val="bg1"/>
+                </a:solidFill>
+              </a:rPr>
+              <a:t>₂  =  255 - 1 = 254 </a:t>
+            </a:r>
+            <a:endParaRPr lang="en-US" altLang="en-US" b="1">
+              <a:solidFill>
+                <a:schemeClr val="bg1"/>
+              </a:solidFill>
+            </a:endParaRPr>
+          </a:p>
+          <a:p>
+            <a:endParaRPr lang="en-US" altLang="en-US" b="1">
+              <a:solidFill>
+                <a:schemeClr val="bg1"/>
+              </a:solidFill>
+            </a:endParaRPr>
+          </a:p>
+          <a:p>
+            <a:endParaRPr lang="en-US" altLang="en-US" b="1">
+              <a:solidFill>
+                <a:schemeClr val="bg1"/>
+              </a:solidFill>
+            </a:endParaRPr>
+          </a:p>
+          <a:p>
+            <a:endParaRPr lang="en-US" altLang="en-US" b="1">
+              <a:solidFill>
+                <a:schemeClr val="bg1"/>
+              </a:solidFill>
+            </a:endParaRPr>
+          </a:p>
+          <a:p>
+            <a:r>
+              <a:rPr lang="en-US" altLang="en-US" b="1">
+                <a:solidFill>
+                  <a:schemeClr val="bg1"/>
+                </a:solidFill>
+              </a:rPr>
+              <a:t>128 64 32 16 8 4 2 1 </a:t>
+            </a:r>
+            <a:r>
+              <a:rPr lang="en-US" altLang="en-GB" b="1">
+                <a:solidFill>
+                  <a:schemeClr val="bg1"/>
+                </a:solidFill>
+              </a:rPr>
+              <a:t> </a:t>
             </a:r>
             <a:endParaRPr lang="en-US" altLang="en-GB" b="1">
               <a:solidFill>
@@ -4765,104 +5377,6 @@
             </a:endParaRPr>
           </a:p>
           <a:p>
-            <a:endParaRPr lang="en-US" altLang="en-GB" b="1">
-              <a:solidFill>
-                <a:schemeClr val="bg1"/>
-              </a:solidFill>
-            </a:endParaRPr>
-          </a:p>
-          <a:p>
-            <a:r>
-              <a:rPr lang="en-US" altLang="en-GB" b="1">
-                <a:solidFill>
-                  <a:schemeClr val="bg1"/>
-                </a:solidFill>
-              </a:rPr>
-              <a:t>00001111</a:t>
-            </a:r>
-            <a:r>
-              <a:rPr lang="en-US" altLang="en-US" b="1">
-                <a:solidFill>
-                  <a:schemeClr val="bg1"/>
-                </a:solidFill>
-              </a:rPr>
-              <a:t>₂</a:t>
-            </a:r>
-            <a:endParaRPr lang="en-US" altLang="en-US" b="1">
-              <a:solidFill>
-                <a:schemeClr val="bg1"/>
-              </a:solidFill>
-            </a:endParaRPr>
-          </a:p>
-          <a:p>
-            <a:endParaRPr lang="en-US" altLang="en-US" b="1">
-              <a:solidFill>
-                <a:schemeClr val="bg1"/>
-              </a:solidFill>
-            </a:endParaRPr>
-          </a:p>
-          <a:p>
-            <a:r>
-              <a:rPr lang="en-US" altLang="en-GB" b="1">
-                <a:solidFill>
-                  <a:schemeClr val="bg1"/>
-                </a:solidFill>
-              </a:rPr>
-              <a:t>10101010</a:t>
-            </a:r>
-            <a:r>
-              <a:rPr lang="en-US" altLang="en-US" b="1">
-                <a:solidFill>
-                  <a:schemeClr val="bg1"/>
-                </a:solidFill>
-              </a:rPr>
-              <a:t>₂</a:t>
-            </a:r>
-            <a:endParaRPr lang="en-US" altLang="en-US" b="1">
-              <a:solidFill>
-                <a:schemeClr val="bg1"/>
-              </a:solidFill>
-            </a:endParaRPr>
-          </a:p>
-          <a:p>
-            <a:endParaRPr lang="en-US" altLang="en-US" b="1">
-              <a:solidFill>
-                <a:schemeClr val="bg1"/>
-              </a:solidFill>
-            </a:endParaRPr>
-          </a:p>
-          <a:p>
-            <a:r>
-              <a:rPr lang="en-US" altLang="en-GB" b="1">
-                <a:solidFill>
-                  <a:schemeClr val="bg1"/>
-                </a:solidFill>
-              </a:rPr>
-              <a:t>11111110</a:t>
-            </a:r>
-            <a:r>
-              <a:rPr lang="en-US" altLang="en-US" b="1">
-                <a:solidFill>
-                  <a:schemeClr val="bg1"/>
-                </a:solidFill>
-              </a:rPr>
-              <a:t>₂</a:t>
-            </a:r>
-            <a:endParaRPr lang="en-US" altLang="en-US" b="1">
-              <a:solidFill>
-                <a:schemeClr val="bg1"/>
-              </a:solidFill>
-            </a:endParaRPr>
-          </a:p>
-          <a:p>
-            <a:r>
-              <a:rPr lang="en-US" altLang="en-GB" b="1">
-                <a:solidFill>
-                  <a:schemeClr val="bg1"/>
-                </a:solidFill>
-              </a:rPr>
-              <a:t> </a:t>
-            </a:r>
             <a:endParaRPr lang="en-US" altLang="en-GB" b="1">
               <a:solidFill>
                 <a:schemeClr val="bg1"/>
@@ -4916,8 +5430,8 @@
         </p:nvSpPr>
         <p:spPr>
           <a:xfrm>
-            <a:off x="5231765" y="1155700"/>
-            <a:ext cx="2150110" cy="2784475"/>
+            <a:off x="3128645" y="897255"/>
+            <a:ext cx="3094355" cy="3081655"/>
           </a:xfrm>
           <a:prstGeom prst="rect">
             <a:avLst/>
@@ -4929,96 +5443,106 @@
             <a:noAutofit/>
           </a:bodyPr>
           <a:p>
+            <a:r>
+              <a:rPr lang="en-US" altLang="en-GB" b="1">
+                <a:solidFill>
+                  <a:schemeClr val="bg1"/>
+                </a:solidFill>
+                <a:sym typeface="+mn-ea"/>
+              </a:rPr>
+              <a:t> Use 8 4 2 1 </a:t>
+            </a:r>
+            <a:endParaRPr lang="en-US" altLang="en-GB" b="1">
+              <a:solidFill>
+                <a:schemeClr val="bg1"/>
+              </a:solidFill>
+              <a:sym typeface="+mn-ea"/>
+            </a:endParaRPr>
+          </a:p>
+          <a:p>
+            <a:r>
+              <a:rPr lang="en-US" altLang="en-GB" b="1">
+                <a:solidFill>
+                  <a:schemeClr val="bg1"/>
+                </a:solidFill>
+                <a:sym typeface="+mn-ea"/>
+              </a:rPr>
+              <a:t>0101</a:t>
+            </a:r>
+            <a:r>
+              <a:rPr lang="en-US" altLang="en-US" b="1">
+                <a:solidFill>
+                  <a:schemeClr val="bg1"/>
+                </a:solidFill>
+                <a:sym typeface="+mn-ea"/>
+              </a:rPr>
+              <a:t>₂    = 0 + 4 + 0 + 1 = 5 </a:t>
+            </a:r>
+            <a:endParaRPr lang="en-US" altLang="en-US" b="1">
+              <a:solidFill>
+                <a:schemeClr val="bg1"/>
+              </a:solidFill>
+            </a:endParaRPr>
+          </a:p>
+          <a:p>
+            <a:r>
+              <a:rPr lang="en-US" altLang="en-GB" b="1">
+                <a:solidFill>
+                  <a:schemeClr val="bg1"/>
+                </a:solidFill>
+                <a:sym typeface="+mn-ea"/>
+              </a:rPr>
+              <a:t>0000</a:t>
+            </a:r>
+            <a:r>
+              <a:rPr lang="en-US" altLang="en-US" b="1">
+                <a:solidFill>
+                  <a:schemeClr val="bg1"/>
+                </a:solidFill>
+                <a:sym typeface="+mn-ea"/>
+              </a:rPr>
+              <a:t>₂ = 0</a:t>
+            </a:r>
+            <a:endParaRPr lang="en-US" altLang="en-US" b="1">
+              <a:solidFill>
+                <a:schemeClr val="bg1"/>
+              </a:solidFill>
+            </a:endParaRPr>
+          </a:p>
+          <a:p>
+            <a:endParaRPr lang="en-US" altLang="en-US" b="1">
+              <a:solidFill>
+                <a:schemeClr val="bg1"/>
+              </a:solidFill>
+            </a:endParaRPr>
+          </a:p>
+          <a:p>
+            <a:r>
+              <a:rPr lang="en-US" altLang="en-GB" b="1">
+                <a:solidFill>
+                  <a:schemeClr val="bg1"/>
+                </a:solidFill>
+                <a:sym typeface="+mn-ea"/>
+              </a:rPr>
+              <a:t>1111</a:t>
+            </a:r>
+            <a:r>
+              <a:rPr lang="en-US" altLang="en-US" b="1">
+                <a:solidFill>
+                  <a:schemeClr val="bg1"/>
+                </a:solidFill>
+                <a:sym typeface="+mn-ea"/>
+              </a:rPr>
+              <a:t>₂ =   8 + 4 + 2 + 1 = 15</a:t>
+            </a:r>
+            <a:endParaRPr lang="en-GB" altLang="en-US"/>
+          </a:p>
+          <a:p>
             <a:endParaRPr lang="en-US" altLang="en-GB">
               <a:solidFill>
-                <a:schemeClr val="bg1"/>
-              </a:solidFill>
-            </a:endParaRPr>
-          </a:p>
-          <a:p>
-            <a:r>
-              <a:rPr lang="en-US" altLang="en-GB" b="1">
-                <a:solidFill>
-                  <a:schemeClr val="bg1"/>
-                </a:solidFill>
-                <a:sym typeface="+mn-ea"/>
-              </a:rPr>
-              <a:t>0101</a:t>
-            </a:r>
-            <a:r>
-              <a:rPr lang="en-US" altLang="en-US" b="1">
-                <a:solidFill>
-                  <a:schemeClr val="bg1"/>
-                </a:solidFill>
-                <a:sym typeface="+mn-ea"/>
-              </a:rPr>
-              <a:t>₂</a:t>
-            </a:r>
-            <a:endParaRPr lang="en-US" altLang="en-US" b="1">
-              <a:solidFill>
-                <a:schemeClr val="bg1"/>
-              </a:solidFill>
-            </a:endParaRPr>
-          </a:p>
-          <a:p>
-            <a:endParaRPr lang="en-US" altLang="en-US" b="1">
-              <a:solidFill>
-                <a:schemeClr val="bg1"/>
-              </a:solidFill>
-            </a:endParaRPr>
-          </a:p>
-          <a:p>
-            <a:r>
-              <a:rPr lang="en-US" altLang="en-GB" b="1">
-                <a:solidFill>
-                  <a:schemeClr val="bg1"/>
-                </a:solidFill>
-                <a:sym typeface="+mn-ea"/>
-              </a:rPr>
-              <a:t>0000</a:t>
-            </a:r>
-            <a:r>
-              <a:rPr lang="en-US" altLang="en-US" b="1">
-                <a:solidFill>
-                  <a:schemeClr val="bg1"/>
-                </a:solidFill>
-                <a:sym typeface="+mn-ea"/>
-              </a:rPr>
-              <a:t>₂</a:t>
-            </a:r>
-            <a:endParaRPr lang="en-US" altLang="en-US" b="1">
-              <a:solidFill>
-                <a:schemeClr val="bg1"/>
-              </a:solidFill>
-            </a:endParaRPr>
-          </a:p>
-          <a:p>
-            <a:endParaRPr lang="en-US" altLang="en-US" b="1">
-              <a:solidFill>
-                <a:schemeClr val="bg1"/>
-              </a:solidFill>
-            </a:endParaRPr>
-          </a:p>
-          <a:p>
-            <a:r>
-              <a:rPr lang="en-US" altLang="en-GB" b="1">
-                <a:solidFill>
-                  <a:schemeClr val="bg1"/>
-                </a:solidFill>
-                <a:sym typeface="+mn-ea"/>
-              </a:rPr>
-              <a:t>1111</a:t>
-            </a:r>
-            <a:r>
-              <a:rPr lang="en-US" altLang="en-US" b="1">
-                <a:solidFill>
-                  <a:schemeClr val="bg1"/>
-                </a:solidFill>
-                <a:sym typeface="+mn-ea"/>
-              </a:rPr>
-              <a:t>₂</a:t>
-            </a:r>
-            <a:endParaRPr lang="en-GB" altLang="en-US"/>
+                <a:srgbClr val="FF0000"/>
+              </a:solidFill>
+            </a:endParaRPr>
           </a:p>
         </p:txBody>
       </p:sp>
